--- a/Documentation/Slides/Week_29.pptx
+++ b/Documentation/Slides/Week_29.pptx
@@ -5,7 +5,7 @@
     <p:sldMasterId id="2147483648" r:id="rId4"/>
   </p:sldMasterIdLst>
   <p:notesMasterIdLst>
-    <p:notesMasterId r:id="rId15"/>
+    <p:notesMasterId r:id="rId17"/>
   </p:notesMasterIdLst>
   <p:sldIdLst>
     <p:sldId id="267" r:id="rId5"/>
@@ -16,37 +16,39 @@
     <p:sldId id="283" r:id="rId10"/>
     <p:sldId id="284" r:id="rId11"/>
     <p:sldId id="285" r:id="rId12"/>
-    <p:sldId id="286" r:id="rId13"/>
-    <p:sldId id="277" r:id="rId14"/>
+    <p:sldId id="287" r:id="rId13"/>
+    <p:sldId id="288" r:id="rId14"/>
+    <p:sldId id="286" r:id="rId15"/>
+    <p:sldId id="277" r:id="rId16"/>
   </p:sldIdLst>
   <p:sldSz cx="9144000" cy="6858000" type="screen4x3"/>
   <p:notesSz cx="6858000" cy="9144000"/>
   <p:embeddedFontLst>
     <p:embeddedFont>
-      <p:font typeface="Acumin Pro Condensed Semibold" panose="020B0706020202020204" pitchFamily="34" charset="77"/>
-      <p:regular r:id="rId16"/>
-      <p:bold r:id="rId17"/>
-      <p:italic r:id="rId18"/>
-      <p:boldItalic r:id="rId19"/>
+      <p:font typeface="Acumin Pro Condensed Semibold" panose="020B0706020202020204"/>
+      <p:regular r:id="rId18"/>
+      <p:bold r:id="rId19"/>
+      <p:italic r:id="rId20"/>
+      <p:boldItalic r:id="rId21"/>
     </p:embeddedFont>
     <p:embeddedFont>
       <p:font typeface="Acumin Pro Medium" panose="020B0604020202020204" pitchFamily="34" charset="77"/>
-      <p:regular r:id="rId20"/>
-      <p:italic r:id="rId21"/>
-    </p:embeddedFont>
-    <p:embeddedFont>
-      <p:font typeface="Franklin Gothic Book" panose="020B0503020102020204" pitchFamily="34" charset="0"/>
       <p:regular r:id="rId22"/>
       <p:italic r:id="rId23"/>
     </p:embeddedFont>
     <p:embeddedFont>
-      <p:font typeface="Franklin Gothic Medium" panose="020B0603020102020204" pitchFamily="34" charset="0"/>
+      <p:font typeface="Franklin Gothic Book" panose="020B0503020102020204" pitchFamily="34" charset="0"/>
       <p:regular r:id="rId24"/>
       <p:italic r:id="rId25"/>
     </p:embeddedFont>
     <p:embeddedFont>
+      <p:font typeface="Franklin Gothic Medium" panose="020B0603020102020204" pitchFamily="34" charset="0"/>
+      <p:regular r:id="rId26"/>
+      <p:italic r:id="rId27"/>
+    </p:embeddedFont>
+    <p:embeddedFont>
       <p:font typeface="Franklin Gothic Medium Cond" panose="020B0606030402020204" pitchFamily="34" charset="0"/>
-      <p:regular r:id="rId26"/>
+      <p:regular r:id="rId28"/>
     </p:embeddedFont>
   </p:embeddedFontLst>
   <p:defaultTextStyle>
@@ -251,7 +253,7 @@
           <a:p>
             <a:fld id="{01926CF7-48D8-2F46-AFC8-8A5D2298DFDD}" type="datetimeFigureOut">
               <a:rPr lang="en-US" smtClean="0"/>
-              <a:t>4/6/26</a:t>
+              <a:t>4/17/26</a:t>
             </a:fld>
             <a:endParaRPr lang="en-US"/>
           </a:p>
@@ -13595,7 +13597,7 @@
               <a:rPr lang="en-US" b="1" dirty="0">
                 <a:latin typeface="Acumin Pro Condensed Semibold" panose="020B0506020202020204" pitchFamily="34" charset="77"/>
               </a:rPr>
-              <a:t>Week 13</a:t>
+              <a:t>Week 14</a:t>
             </a:r>
           </a:p>
         </p:txBody>
@@ -13655,7 +13657,7 @@
           <a:p>
             <a:r>
               <a:rPr lang="en-US" dirty="0"/>
-              <a:t>03/30/26</a:t>
+              <a:t>04/17/26</a:t>
             </a:r>
           </a:p>
         </p:txBody>
@@ -13674,6 +13676,504 @@
 </file>
 
 <file path=ppt/slides/slide10.xml><?xml version="1.0" encoding="utf-8"?>
+<p:sld xmlns:a="http://schemas.openxmlformats.org/drawingml/2006/main" xmlns:r="http://schemas.openxmlformats.org/officeDocument/2006/relationships" xmlns:p="http://schemas.openxmlformats.org/presentationml/2006/main">
+  <p:cSld>
+    <p:spTree>
+      <p:nvGrpSpPr>
+        <p:cNvPr id="1" name="">
+          <a:extLst>
+            <a:ext uri="{FF2B5EF4-FFF2-40B4-BE49-F238E27FC236}">
+              <a16:creationId xmlns:a16="http://schemas.microsoft.com/office/drawing/2014/main" id="{5FE8C458-FA37-EFEB-C812-6DE4A9670C79}"/>
+            </a:ext>
+          </a:extLst>
+        </p:cNvPr>
+        <p:cNvGrpSpPr/>
+        <p:nvPr/>
+      </p:nvGrpSpPr>
+      <p:grpSpPr>
+        <a:xfrm>
+          <a:off x="0" y="0"/>
+          <a:ext cx="0" cy="0"/>
+          <a:chOff x="0" y="0"/>
+          <a:chExt cx="0" cy="0"/>
+        </a:xfrm>
+      </p:grpSpPr>
+      <p:sp>
+        <p:nvSpPr>
+          <p:cNvPr id="2" name="Text Placeholder 1">
+            <a:extLst>
+              <a:ext uri="{FF2B5EF4-FFF2-40B4-BE49-F238E27FC236}">
+                <a16:creationId xmlns:a16="http://schemas.microsoft.com/office/drawing/2014/main" id="{1E58A734-D2BF-178D-086B-FB51698EB760}"/>
+              </a:ext>
+            </a:extLst>
+          </p:cNvPr>
+          <p:cNvSpPr>
+            <a:spLocks noGrp="1"/>
+          </p:cNvSpPr>
+          <p:nvPr>
+            <p:ph type="body" sz="quarter" idx="11"/>
+          </p:nvPr>
+        </p:nvSpPr>
+        <p:spPr/>
+        <p:txBody>
+          <a:bodyPr/>
+          <a:lstStyle/>
+          <a:p>
+            <a:r>
+              <a:rPr lang="en-US" dirty="0"/>
+              <a:t>Paper criteria for Conference met</a:t>
+            </a:r>
+          </a:p>
+        </p:txBody>
+      </p:sp>
+      <p:sp>
+        <p:nvSpPr>
+          <p:cNvPr id="3" name="Text Placeholder 2">
+            <a:extLst>
+              <a:ext uri="{FF2B5EF4-FFF2-40B4-BE49-F238E27FC236}">
+                <a16:creationId xmlns:a16="http://schemas.microsoft.com/office/drawing/2014/main" id="{A777D86F-B10D-DB2C-34BD-C800C9F8C5B5}"/>
+              </a:ext>
+            </a:extLst>
+          </p:cNvPr>
+          <p:cNvSpPr>
+            <a:spLocks noGrp="1"/>
+          </p:cNvSpPr>
+          <p:nvPr>
+            <p:ph type="body" sz="quarter" idx="10"/>
+          </p:nvPr>
+        </p:nvSpPr>
+        <p:spPr/>
+        <p:txBody>
+          <a:bodyPr/>
+          <a:lstStyle/>
+          <a:p>
+            <a:r>
+              <a:rPr lang="en-US" b="1" dirty="0"/>
+              <a:t>Submission Requirements</a:t>
+            </a:r>
+          </a:p>
+          <a:p>
+            <a:pPr marL="285750" indent="-285750">
+              <a:buFont typeface="Arial" panose="020B0604020202020204" pitchFamily="34" charset="0"/>
+              <a:buChar char="•"/>
+            </a:pPr>
+            <a:r>
+              <a:rPr lang="en-US" dirty="0"/>
+              <a:t>Main manuscript</a:t>
+            </a:r>
+          </a:p>
+          <a:p>
+            <a:pPr marL="285750" indent="-285750">
+              <a:buFont typeface="Arial" panose="020B0604020202020204" pitchFamily="34" charset="0"/>
+              <a:buChar char="•"/>
+            </a:pPr>
+            <a:r>
+              <a:rPr lang="en-US" dirty="0"/>
+              <a:t>Graphical Abstract Image</a:t>
+            </a:r>
+          </a:p>
+          <a:p>
+            <a:pPr marL="285750" indent="-285750">
+              <a:buFont typeface="Arial" panose="020B0604020202020204" pitchFamily="34" charset="0"/>
+              <a:buChar char="•"/>
+            </a:pPr>
+            <a:r>
+              <a:rPr lang="en-US" dirty="0"/>
+              <a:t>*Conflict of Interest</a:t>
+            </a:r>
+          </a:p>
+          <a:p>
+            <a:pPr marL="285750" indent="-285750">
+              <a:buFont typeface="Arial" panose="020B0604020202020204" pitchFamily="34" charset="0"/>
+              <a:buChar char="•"/>
+            </a:pPr>
+            <a:r>
+              <a:rPr lang="en-US" dirty="0"/>
+              <a:t>Cover Letter</a:t>
+            </a:r>
+          </a:p>
+          <a:p>
+            <a:pPr marL="285750" indent="-285750">
+              <a:buFont typeface="Arial" panose="020B0604020202020204" pitchFamily="34" charset="0"/>
+              <a:buChar char="•"/>
+            </a:pPr>
+            <a:r>
+              <a:rPr lang="en-US" dirty="0"/>
+              <a:t>Tracked Changes</a:t>
+            </a:r>
+          </a:p>
+          <a:p>
+            <a:pPr marL="285750" indent="-285750">
+              <a:buFont typeface="Arial" panose="020B0604020202020204" pitchFamily="34" charset="0"/>
+              <a:buChar char="•"/>
+            </a:pPr>
+            <a:r>
+              <a:rPr lang="en-US" dirty="0"/>
+              <a:t>Supplementary Material*</a:t>
+            </a:r>
+          </a:p>
+          <a:p>
+            <a:pPr marL="285750" indent="-285750">
+              <a:buFont typeface="Arial" panose="020B0604020202020204" pitchFamily="34" charset="0"/>
+              <a:buChar char="•"/>
+            </a:pPr>
+            <a:r>
+              <a:rPr lang="en-US" dirty="0"/>
+              <a:t>Image*</a:t>
+            </a:r>
+          </a:p>
+          <a:p>
+            <a:pPr marL="285750" indent="-285750">
+              <a:buFont typeface="Arial" panose="020B0604020202020204" pitchFamily="34" charset="0"/>
+              <a:buChar char="•"/>
+            </a:pPr>
+            <a:r>
+              <a:rPr lang="en-US" dirty="0"/>
+              <a:t>LaTeX supplementary file*</a:t>
+            </a:r>
+          </a:p>
+          <a:p>
+            <a:pPr marL="285750" indent="-285750">
+              <a:buFont typeface="Arial" panose="020B0604020202020204" pitchFamily="34" charset="0"/>
+              <a:buChar char="•"/>
+            </a:pPr>
+            <a:r>
+              <a:rPr lang="en-US" dirty="0"/>
+              <a:t>Previously Published – Statement*</a:t>
+            </a:r>
+          </a:p>
+          <a:p>
+            <a:pPr marL="285750" indent="-285750">
+              <a:buFont typeface="Arial" panose="020B0604020202020204" pitchFamily="34" charset="0"/>
+              <a:buChar char="•"/>
+            </a:pPr>
+            <a:r>
+              <a:rPr lang="en-US" dirty="0"/>
+              <a:t>Previously Published – Files*</a:t>
+            </a:r>
+          </a:p>
+          <a:p>
+            <a:pPr marL="285750" indent="-285750">
+              <a:buFont typeface="Arial" panose="020B0604020202020204" pitchFamily="34" charset="0"/>
+              <a:buChar char="•"/>
+            </a:pPr>
+            <a:endParaRPr lang="en-US" b="1" dirty="0"/>
+          </a:p>
+        </p:txBody>
+      </p:sp>
+      <p:sp>
+        <p:nvSpPr>
+          <p:cNvPr id="4" name="Title 3">
+            <a:extLst>
+              <a:ext uri="{FF2B5EF4-FFF2-40B4-BE49-F238E27FC236}">
+                <a16:creationId xmlns:a16="http://schemas.microsoft.com/office/drawing/2014/main" id="{AC50E8C3-3E79-2445-4E1A-03DA7661238F}"/>
+              </a:ext>
+            </a:extLst>
+          </p:cNvPr>
+          <p:cNvSpPr>
+            <a:spLocks noGrp="1"/>
+          </p:cNvSpPr>
+          <p:nvPr>
+            <p:ph type="title"/>
+          </p:nvPr>
+        </p:nvSpPr>
+        <p:spPr/>
+        <p:txBody>
+          <a:bodyPr/>
+          <a:lstStyle/>
+          <a:p>
+            <a:r>
+              <a:rPr lang="en-US" dirty="0"/>
+              <a:t>Paper Updates</a:t>
+            </a:r>
+          </a:p>
+        </p:txBody>
+      </p:sp>
+      <p:sp>
+        <p:nvSpPr>
+          <p:cNvPr id="5" name="Footer Placeholder 4">
+            <a:extLst>
+              <a:ext uri="{FF2B5EF4-FFF2-40B4-BE49-F238E27FC236}">
+                <a16:creationId xmlns:a16="http://schemas.microsoft.com/office/drawing/2014/main" id="{A051DA38-E7B9-784E-1E1E-01955224968D}"/>
+              </a:ext>
+            </a:extLst>
+          </p:cNvPr>
+          <p:cNvSpPr>
+            <a:spLocks noGrp="1"/>
+          </p:cNvSpPr>
+          <p:nvPr>
+            <p:ph type="ftr" sz="quarter" idx="12"/>
+          </p:nvPr>
+        </p:nvSpPr>
+        <p:spPr/>
+        <p:txBody>
+          <a:bodyPr/>
+          <a:lstStyle/>
+          <a:p>
+            <a:pPr algn="r"/>
+            <a:r>
+              <a:rPr lang="en-US" dirty="0"/>
+              <a:t>9/11</a:t>
+            </a:r>
+          </a:p>
+        </p:txBody>
+      </p:sp>
+      <p:pic>
+        <p:nvPicPr>
+          <p:cNvPr id="1026" name="Picture 2">
+            <a:extLst>
+              <a:ext uri="{FF2B5EF4-FFF2-40B4-BE49-F238E27FC236}">
+                <a16:creationId xmlns:a16="http://schemas.microsoft.com/office/drawing/2014/main" id="{077589F8-1E74-3F33-75BD-12BC50AF8F4E}"/>
+              </a:ext>
+            </a:extLst>
+          </p:cNvPr>
+          <p:cNvPicPr>
+            <a:picLocks noChangeAspect="1" noChangeArrowheads="1"/>
+          </p:cNvPicPr>
+          <p:nvPr/>
+        </p:nvPicPr>
+        <p:blipFill>
+          <a:blip r:embed="rId2">
+            <a:extLst>
+              <a:ext uri="{28A0092B-C50C-407E-A947-70E740481C1C}">
+                <a14:useLocalDpi xmlns:a14="http://schemas.microsoft.com/office/drawing/2010/main" val="0"/>
+              </a:ext>
+            </a:extLst>
+          </a:blip>
+          <a:srcRect/>
+          <a:stretch>
+            <a:fillRect/>
+          </a:stretch>
+        </p:blipFill>
+        <p:spPr bwMode="auto">
+          <a:xfrm>
+            <a:off x="4152275" y="1320051"/>
+            <a:ext cx="4760581" cy="5266508"/>
+          </a:xfrm>
+          <a:prstGeom prst="rect">
+            <a:avLst/>
+          </a:prstGeom>
+          <a:noFill/>
+          <a:extLst>
+            <a:ext uri="{909E8E84-426E-40DD-AFC4-6F175D3DCCD1}">
+              <a14:hiddenFill xmlns:a14="http://schemas.microsoft.com/office/drawing/2010/main">
+                <a:solidFill>
+                  <a:srgbClr val="FFFFFF"/>
+                </a:solidFill>
+              </a14:hiddenFill>
+            </a:ext>
+          </a:extLst>
+        </p:spPr>
+      </p:pic>
+    </p:spTree>
+    <p:extLst>
+      <p:ext uri="{BB962C8B-B14F-4D97-AF65-F5344CB8AC3E}">
+        <p14:creationId xmlns:p14="http://schemas.microsoft.com/office/powerpoint/2010/main" val="2930002171"/>
+      </p:ext>
+    </p:extLst>
+  </p:cSld>
+  <p:clrMapOvr>
+    <a:masterClrMapping/>
+  </p:clrMapOvr>
+</p:sld>
+</file>
+
+<file path=ppt/slides/slide11.xml><?xml version="1.0" encoding="utf-8"?>
+<p:sld xmlns:a="http://schemas.openxmlformats.org/drawingml/2006/main" xmlns:r="http://schemas.openxmlformats.org/officeDocument/2006/relationships" xmlns:p="http://schemas.openxmlformats.org/presentationml/2006/main">
+  <p:cSld>
+    <p:spTree>
+      <p:nvGrpSpPr>
+        <p:cNvPr id="1" name=""/>
+        <p:cNvGrpSpPr/>
+        <p:nvPr/>
+      </p:nvGrpSpPr>
+      <p:grpSpPr>
+        <a:xfrm>
+          <a:off x="0" y="0"/>
+          <a:ext cx="0" cy="0"/>
+          <a:chOff x="0" y="0"/>
+          <a:chExt cx="0" cy="0"/>
+        </a:xfrm>
+      </p:grpSpPr>
+      <p:sp>
+        <p:nvSpPr>
+          <p:cNvPr id="2" name="Text Placeholder 1">
+            <a:extLst>
+              <a:ext uri="{FF2B5EF4-FFF2-40B4-BE49-F238E27FC236}">
+                <a16:creationId xmlns:a16="http://schemas.microsoft.com/office/drawing/2014/main" id="{0CD72587-DF24-E361-3C87-CFAE3C408C3A}"/>
+              </a:ext>
+            </a:extLst>
+          </p:cNvPr>
+          <p:cNvSpPr>
+            <a:spLocks noGrp="1"/>
+          </p:cNvSpPr>
+          <p:nvPr>
+            <p:ph type="body" sz="quarter" idx="11"/>
+          </p:nvPr>
+        </p:nvSpPr>
+        <p:spPr/>
+        <p:txBody>
+          <a:bodyPr/>
+          <a:lstStyle/>
+          <a:p>
+            <a:r>
+              <a:rPr lang="en-US" dirty="0"/>
+              <a:t>Next Week’s Plan</a:t>
+            </a:r>
+          </a:p>
+        </p:txBody>
+      </p:sp>
+      <p:sp>
+        <p:nvSpPr>
+          <p:cNvPr id="3" name="Text Placeholder 2">
+            <a:extLst>
+              <a:ext uri="{FF2B5EF4-FFF2-40B4-BE49-F238E27FC236}">
+                <a16:creationId xmlns:a16="http://schemas.microsoft.com/office/drawing/2014/main" id="{54C18513-FBE2-EBBB-125E-FA48BA6B1BEC}"/>
+              </a:ext>
+            </a:extLst>
+          </p:cNvPr>
+          <p:cNvSpPr>
+            <a:spLocks noGrp="1"/>
+          </p:cNvSpPr>
+          <p:nvPr>
+            <p:ph type="body" sz="quarter" idx="10"/>
+          </p:nvPr>
+        </p:nvSpPr>
+        <p:spPr/>
+        <p:txBody>
+          <a:bodyPr/>
+          <a:lstStyle/>
+          <a:p>
+            <a:pPr marL="285750" indent="-285750">
+              <a:buFont typeface="Arial" panose="020B0604020202020204" pitchFamily="34" charset="0"/>
+              <a:buChar char="•"/>
+            </a:pPr>
+            <a:r>
+              <a:rPr lang="en-US" dirty="0"/>
+              <a:t>Finalize Paper (Professor Salas meeting)</a:t>
+            </a:r>
+          </a:p>
+          <a:p>
+            <a:pPr marL="285750" indent="-285750">
+              <a:buFont typeface="Arial" panose="020B0604020202020204" pitchFamily="34" charset="0"/>
+              <a:buChar char="•"/>
+            </a:pPr>
+            <a:r>
+              <a:rPr lang="en-US" dirty="0"/>
+              <a:t>Ask </a:t>
+            </a:r>
+            <a:r>
+              <a:rPr lang="en-US" dirty="0" err="1"/>
+              <a:t>Omosalewa</a:t>
+            </a:r>
+            <a:r>
+              <a:rPr lang="en-US" dirty="0"/>
+              <a:t> for a recording of the data as it is collected</a:t>
+            </a:r>
+          </a:p>
+          <a:p>
+            <a:pPr marL="628650" lvl="1" indent="-285750">
+              <a:buFont typeface="Arial" panose="020B0604020202020204" pitchFamily="34" charset="0"/>
+              <a:buChar char="•"/>
+            </a:pPr>
+            <a:r>
+              <a:rPr lang="en-US" dirty="0"/>
+              <a:t>Match up chicken results to chicken video</a:t>
+            </a:r>
+          </a:p>
+          <a:p>
+            <a:pPr marL="628650" lvl="1" indent="-285750">
+              <a:buFont typeface="Arial" panose="020B0604020202020204" pitchFamily="34" charset="0"/>
+              <a:buChar char="•"/>
+            </a:pPr>
+            <a:r>
+              <a:rPr lang="en-US" dirty="0"/>
+              <a:t>Edit the video so such results are shown while the chicken is moving</a:t>
+            </a:r>
+          </a:p>
+          <a:p>
+            <a:pPr marL="285750" indent="-285750">
+              <a:buFont typeface="Arial" panose="020B0604020202020204" pitchFamily="34" charset="0"/>
+              <a:buChar char="•"/>
+            </a:pPr>
+            <a:r>
+              <a:rPr lang="en-US" dirty="0"/>
+              <a:t>Do paper-based data analysis on data collected</a:t>
+            </a:r>
+          </a:p>
+        </p:txBody>
+      </p:sp>
+      <p:sp>
+        <p:nvSpPr>
+          <p:cNvPr id="4" name="Title 3">
+            <a:extLst>
+              <a:ext uri="{FF2B5EF4-FFF2-40B4-BE49-F238E27FC236}">
+                <a16:creationId xmlns:a16="http://schemas.microsoft.com/office/drawing/2014/main" id="{38C5F57F-D41F-FAF8-68C5-CD8D95AF87F4}"/>
+              </a:ext>
+            </a:extLst>
+          </p:cNvPr>
+          <p:cNvSpPr>
+            <a:spLocks noGrp="1"/>
+          </p:cNvSpPr>
+          <p:nvPr>
+            <p:ph type="title"/>
+          </p:nvPr>
+        </p:nvSpPr>
+        <p:spPr/>
+        <p:txBody>
+          <a:bodyPr/>
+          <a:lstStyle/>
+          <a:p>
+            <a:r>
+              <a:rPr lang="en-US" dirty="0"/>
+              <a:t>Next Week</a:t>
+            </a:r>
+          </a:p>
+        </p:txBody>
+      </p:sp>
+      <p:sp>
+        <p:nvSpPr>
+          <p:cNvPr id="5" name="Footer Placeholder 4">
+            <a:extLst>
+              <a:ext uri="{FF2B5EF4-FFF2-40B4-BE49-F238E27FC236}">
+                <a16:creationId xmlns:a16="http://schemas.microsoft.com/office/drawing/2014/main" id="{8E633180-B8A6-C9B8-09AC-F39A8DDB0F4A}"/>
+              </a:ext>
+            </a:extLst>
+          </p:cNvPr>
+          <p:cNvSpPr>
+            <a:spLocks noGrp="1"/>
+          </p:cNvSpPr>
+          <p:nvPr>
+            <p:ph type="ftr" sz="quarter" idx="12"/>
+          </p:nvPr>
+        </p:nvSpPr>
+        <p:spPr/>
+        <p:txBody>
+          <a:bodyPr/>
+          <a:lstStyle/>
+          <a:p>
+            <a:pPr algn="r"/>
+            <a:r>
+              <a:rPr lang="en-US" dirty="0"/>
+              <a:t>10/11</a:t>
+            </a:r>
+          </a:p>
+        </p:txBody>
+      </p:sp>
+    </p:spTree>
+    <p:extLst>
+      <p:ext uri="{BB962C8B-B14F-4D97-AF65-F5344CB8AC3E}">
+        <p14:creationId xmlns:p14="http://schemas.microsoft.com/office/powerpoint/2010/main" val="1589025477"/>
+      </p:ext>
+    </p:extLst>
+  </p:cSld>
+  <p:clrMapOvr>
+    <a:masterClrMapping/>
+  </p:clrMapOvr>
+</p:sld>
+</file>
+
+<file path=ppt/slides/slide12.xml><?xml version="1.0" encoding="utf-8"?>
 <p:sld xmlns:a="http://schemas.openxmlformats.org/drawingml/2006/main" xmlns:r="http://schemas.openxmlformats.org/officeDocument/2006/relationships" xmlns:p="http://schemas.openxmlformats.org/presentationml/2006/main">
   <p:cSld>
     <p:spTree>
@@ -13927,7 +14427,27 @@
             </a:pPr>
             <a:r>
               <a:rPr lang="en-US" dirty="0"/>
-              <a:t>NDA should be addressed to Professor Nawrocki soon</a:t>
+              <a:t>NDA resolutions</a:t>
+            </a:r>
+          </a:p>
+          <a:p>
+            <a:pPr marL="285750" indent="-285750">
+              <a:buFont typeface="Arial" panose="020B0604020202020204" pitchFamily="34" charset="0"/>
+              <a:buChar char="•"/>
+            </a:pPr>
+            <a:r>
+              <a:rPr lang="en-US" dirty="0"/>
+              <a:t>Paper Updates</a:t>
+            </a:r>
+          </a:p>
+          <a:p>
+            <a:pPr marL="628650" lvl="1" indent="-285750">
+              <a:buFont typeface="Arial" panose="020B0604020202020204" pitchFamily="34" charset="0"/>
+              <a:buChar char="•"/>
+            </a:pPr>
+            <a:r>
+              <a:rPr lang="en-US" dirty="0"/>
+              <a:t>Paper criteria for Conference met</a:t>
             </a:r>
           </a:p>
           <a:p>
@@ -14029,7 +14549,7 @@
             <a:pPr algn="r"/>
             <a:r>
               <a:rPr lang="en-US" dirty="0"/>
-              <a:t>2/10</a:t>
+              <a:t>2/11</a:t>
             </a:r>
           </a:p>
         </p:txBody>
@@ -14224,10 +14744,9 @@
           <a:p>
             <a:pPr algn="r"/>
             <a:r>
-              <a:rPr lang="en-US"/>
-              <a:t>3/31/23            ‹#›</a:t>
-            </a:r>
-            <a:endParaRPr lang="en-US" dirty="0"/>
+              <a:rPr lang="en-US" dirty="0"/>
+              <a:t>3/11</a:t>
+            </a:r>
           </a:p>
         </p:txBody>
       </p:sp>
@@ -14378,10 +14897,9 @@
           <a:p>
             <a:pPr algn="r"/>
             <a:r>
-              <a:rPr lang="en-US"/>
-              <a:t>3/31/23            ‹#›</a:t>
-            </a:r>
-            <a:endParaRPr lang="en-US" dirty="0"/>
+              <a:rPr lang="en-US" dirty="0"/>
+              <a:t>4/11</a:t>
+            </a:r>
           </a:p>
         </p:txBody>
       </p:sp>
@@ -14599,36 +15117,6 @@
       </p:sp>
       <p:sp>
         <p:nvSpPr>
-          <p:cNvPr id="3" name="Text Placeholder 2">
-            <a:extLst>
-              <a:ext uri="{FF2B5EF4-FFF2-40B4-BE49-F238E27FC236}">
-                <a16:creationId xmlns:a16="http://schemas.microsoft.com/office/drawing/2014/main" id="{C073C62C-A207-1886-E353-60B745F41EF5}"/>
-              </a:ext>
-            </a:extLst>
-          </p:cNvPr>
-          <p:cNvSpPr>
-            <a:spLocks noGrp="1"/>
-          </p:cNvSpPr>
-          <p:nvPr>
-            <p:ph type="body" sz="quarter" idx="10"/>
-          </p:nvPr>
-        </p:nvSpPr>
-        <p:spPr>
-          <a:xfrm>
-            <a:off x="4669185" y="3886181"/>
-            <a:ext cx="3780849" cy="2227353"/>
-          </a:xfrm>
-        </p:spPr>
-        <p:txBody>
-          <a:bodyPr/>
-          <a:lstStyle/>
-          <a:p>
-            <a:endParaRPr lang="en-US" dirty="0"/>
-          </a:p>
-        </p:txBody>
-      </p:sp>
-      <p:sp>
-        <p:nvSpPr>
           <p:cNvPr id="4" name="Title 3">
             <a:extLst>
               <a:ext uri="{FF2B5EF4-FFF2-40B4-BE49-F238E27FC236}">
@@ -14680,10 +15168,9 @@
           <a:p>
             <a:pPr algn="r"/>
             <a:r>
-              <a:rPr lang="en-US"/>
-              <a:t>3/31/23            ‹#›</a:t>
-            </a:r>
-            <a:endParaRPr lang="en-US" dirty="0"/>
+              <a:rPr lang="en-US" dirty="0"/>
+              <a:t>5/11</a:t>
+            </a:r>
           </a:p>
         </p:txBody>
       </p:sp>
@@ -14716,7 +15203,7 @@
         </p:blipFill>
         <p:spPr bwMode="auto">
           <a:xfrm>
-            <a:off x="4229099" y="3544505"/>
+            <a:off x="4119768" y="3128869"/>
             <a:ext cx="4572000" cy="2571750"/>
           </a:xfrm>
           <a:prstGeom prst="rect">
@@ -14979,8 +15466,8 @@
         </p:blipFill>
         <p:spPr>
           <a:xfrm>
-            <a:off x="693966" y="3544505"/>
-            <a:ext cx="2946400" cy="2184400"/>
+            <a:off x="553399" y="3128869"/>
+            <a:ext cx="3465202" cy="2569029"/>
           </a:xfrm>
           <a:prstGeom prst="rect">
             <a:avLst/>
@@ -15104,10 +15591,9 @@
           <a:p>
             <a:pPr algn="r"/>
             <a:r>
-              <a:rPr lang="en-US"/>
-              <a:t>3/31/23            ‹#›</a:t>
-            </a:r>
-            <a:endParaRPr lang="en-US" dirty="0"/>
+              <a:rPr lang="en-US" dirty="0"/>
+              <a:t>6/11</a:t>
+            </a:r>
           </a:p>
         </p:txBody>
       </p:sp>
@@ -15329,7 +15815,17 @@
             </a:pPr>
             <a:r>
               <a:rPr lang="en-US" dirty="0"/>
-              <a:t>Set maximum records to an even higher constraint</a:t>
+              <a:t>Set maximum records to an even higher constraint (More data storage)</a:t>
+            </a:r>
+          </a:p>
+          <a:p>
+            <a:pPr marL="285750" indent="-285750">
+              <a:buFont typeface="Arial" panose="020B0604020202020204" pitchFamily="34" charset="0"/>
+              <a:buChar char="•"/>
+            </a:pPr>
+            <a:r>
+              <a:rPr lang="en-US" dirty="0"/>
+              <a:t>Newest version released 4/16</a:t>
             </a:r>
           </a:p>
         </p:txBody>
@@ -15451,10 +15947,9 @@
           <a:p>
             <a:pPr algn="r"/>
             <a:r>
-              <a:rPr lang="en-US"/>
-              <a:t>3/31/23            ‹#›</a:t>
-            </a:r>
-            <a:endParaRPr lang="en-US" dirty="0"/>
+              <a:rPr lang="en-US" dirty="0"/>
+              <a:t>7/11</a:t>
+            </a:r>
           </a:p>
         </p:txBody>
       </p:sp>
@@ -15717,14 +16212,15 @@
         </p:nvPicPr>
         <p:blipFill>
           <a:blip r:embed="rId3"/>
+          <a:srcRect l="30614"/>
           <a:stretch>
             <a:fillRect/>
           </a:stretch>
         </p:blipFill>
         <p:spPr>
           <a:xfrm>
-            <a:off x="179488" y="3429000"/>
-            <a:ext cx="4256432" cy="2481763"/>
+            <a:off x="887756" y="2832913"/>
+            <a:ext cx="3765566" cy="3164278"/>
           </a:xfrm>
           <a:prstGeom prst="rect">
             <a:avLst/>
@@ -15790,7 +16286,7 @@
           <a:p>
             <a:r>
               <a:rPr lang="en-US" dirty="0"/>
-              <a:t>NDA should be addressed to Professor Nawrocki soon</a:t>
+              <a:t>NDA resolutions</a:t>
             </a:r>
           </a:p>
         </p:txBody>
@@ -15852,10 +16348,9 @@
           <a:p>
             <a:pPr algn="r"/>
             <a:r>
-              <a:rPr lang="en-US"/>
-              <a:t>3/31/23            ‹#›</a:t>
-            </a:r>
-            <a:endParaRPr lang="en-US" dirty="0"/>
+              <a:rPr lang="en-US" dirty="0"/>
+              <a:t>8/11</a:t>
+            </a:r>
           </a:p>
         </p:txBody>
       </p:sp>
@@ -16089,6 +16584,36 @@
             </a:r>
           </a:p>
           <a:p>
+            <a:pPr marL="285750" indent="-285750">
+              <a:buFont typeface="Arial" panose="020B0604020202020204" pitchFamily="34" charset="0"/>
+              <a:buChar char="•"/>
+            </a:pPr>
+            <a:r>
+              <a:rPr lang="en-US" dirty="0"/>
+              <a:t>Purdue legal department has version of NDA and should be in the process of signing</a:t>
+            </a:r>
+          </a:p>
+          <a:p>
+            <a:pPr marL="628650" lvl="1" indent="-285750">
+              <a:buFont typeface="Arial" panose="020B0604020202020204" pitchFamily="34" charset="0"/>
+              <a:buChar char="•"/>
+            </a:pPr>
+            <a:r>
+              <a:rPr lang="en-US" dirty="0"/>
+              <a:t>Should be able to work with PC110 manually</a:t>
+            </a:r>
+          </a:p>
+          <a:p>
+            <a:pPr marL="628650" lvl="1" indent="-285750">
+              <a:buFont typeface="Arial" panose="020B0604020202020204" pitchFamily="34" charset="0"/>
+              <a:buChar char="•"/>
+            </a:pPr>
+            <a:r>
+              <a:rPr lang="en-US" dirty="0"/>
+              <a:t>Can switch to P1110 (Slightly larger module) if needed</a:t>
+            </a:r>
+          </a:p>
+          <a:p>
             <a:pPr lvl="1"/>
             <a:endParaRPr lang="en-US" dirty="0"/>
           </a:p>
@@ -16129,7 +16654,7 @@
           <p:cNvPr id="2" name="Text Placeholder 1">
             <a:extLst>
               <a:ext uri="{FF2B5EF4-FFF2-40B4-BE49-F238E27FC236}">
-                <a16:creationId xmlns:a16="http://schemas.microsoft.com/office/drawing/2014/main" id="{0CD72587-DF24-E361-3C87-CFAE3C408C3A}"/>
+                <a16:creationId xmlns:a16="http://schemas.microsoft.com/office/drawing/2014/main" id="{A7236C74-7453-7834-D1B2-9F27A01E8E3E}"/>
               </a:ext>
             </a:extLst>
           </p:cNvPr>
@@ -16147,7 +16672,7 @@
           <a:p>
             <a:r>
               <a:rPr lang="en-US" dirty="0"/>
-              <a:t>Next Week’s Plan</a:t>
+              <a:t>Paper criteria for Conference met</a:t>
             </a:r>
           </a:p>
         </p:txBody>
@@ -16157,7 +16682,7 @@
           <p:cNvPr id="3" name="Text Placeholder 2">
             <a:extLst>
               <a:ext uri="{FF2B5EF4-FFF2-40B4-BE49-F238E27FC236}">
-                <a16:creationId xmlns:a16="http://schemas.microsoft.com/office/drawing/2014/main" id="{54C18513-FBE2-EBBB-125E-FA48BA6B1BEC}"/>
+                <a16:creationId xmlns:a16="http://schemas.microsoft.com/office/drawing/2014/main" id="{EA159BC6-04A7-45A1-8E1B-E069F08AF8CD}"/>
               </a:ext>
             </a:extLst>
           </p:cNvPr>
@@ -16172,6 +16697,12 @@
         <p:txBody>
           <a:bodyPr/>
           <a:lstStyle/>
+          <a:p>
+            <a:r>
+              <a:rPr lang="en-US" b="1" dirty="0"/>
+              <a:t>IEEE Sensors 2026 Submission B Guidelines:</a:t>
+            </a:r>
+          </a:p>
           <a:p>
             <a:pPr marL="285750" indent="-285750">
               <a:buFont typeface="Arial" panose="020B0604020202020204" pitchFamily="34" charset="0"/>
@@ -16179,7 +16710,7 @@
             </a:pPr>
             <a:r>
               <a:rPr lang="en-US" dirty="0"/>
-              <a:t>Finalize Paper</a:t>
+              <a:t>Paper Length: Maximum 3 pages including figures, tables &amp; references or maximum 4 pages are allowed if the 4th page is only reference (Page maximum very strict)</a:t>
             </a:r>
           </a:p>
           <a:p>
@@ -16189,35 +16720,7 @@
             </a:pPr>
             <a:r>
               <a:rPr lang="en-US" dirty="0"/>
-              <a:t>Ask </a:t>
-            </a:r>
-            <a:r>
-              <a:rPr lang="en-US" dirty="0" err="1"/>
-              <a:t>Omosalewa</a:t>
-            </a:r>
-            <a:r>
-              <a:rPr lang="en-US" dirty="0"/>
-              <a:t> for a recording of the data as it is collected</a:t>
-            </a:r>
-          </a:p>
-          <a:p>
-            <a:pPr marL="628650" lvl="1" indent="-285750">
-              <a:buFont typeface="Arial" panose="020B0604020202020204" pitchFamily="34" charset="0"/>
-              <a:buChar char="•"/>
-            </a:pPr>
-            <a:r>
-              <a:rPr lang="en-US" dirty="0"/>
-              <a:t>Match up chicken results to chicken video</a:t>
-            </a:r>
-          </a:p>
-          <a:p>
-            <a:pPr marL="628650" lvl="1" indent="-285750">
-              <a:buFont typeface="Arial" panose="020B0604020202020204" pitchFamily="34" charset="0"/>
-              <a:buChar char="•"/>
-            </a:pPr>
-            <a:r>
-              <a:rPr lang="en-US" dirty="0"/>
-              <a:t>Edit the video so such results are shown</a:t>
+              <a:t>Paper Size: US Letter (8.5" x 11") or A4 (210mm X 297mm)</a:t>
             </a:r>
           </a:p>
           <a:p>
@@ -16227,8 +16730,61 @@
             </a:pPr>
             <a:r>
               <a:rPr lang="en-US" dirty="0"/>
-              <a:t>Do final data analysis on data collected</a:t>
-            </a:r>
+              <a:t>Fonts: Embed ALL fonts in your PDF file. Avoid the use of Type 3 fonts.</a:t>
+            </a:r>
+          </a:p>
+          <a:p>
+            <a:pPr marL="285750" indent="-285750">
+              <a:buFont typeface="Arial" panose="020B0604020202020204" pitchFamily="34" charset="0"/>
+              <a:buChar char="•"/>
+            </a:pPr>
+            <a:r>
+              <a:rPr lang="en-US" dirty="0"/>
+              <a:t>File Format: Adobe PDF (.pdf)</a:t>
+            </a:r>
+          </a:p>
+          <a:p>
+            <a:pPr marL="285750" indent="-285750">
+              <a:buFont typeface="Arial" panose="020B0604020202020204" pitchFamily="34" charset="0"/>
+              <a:buChar char="•"/>
+            </a:pPr>
+            <a:r>
+              <a:rPr lang="en-US" dirty="0"/>
+              <a:t>Allowed File Size: 5.0MB</a:t>
+            </a:r>
+          </a:p>
+          <a:p>
+            <a:pPr marL="285750" indent="-285750">
+              <a:buFont typeface="Arial" panose="020B0604020202020204" pitchFamily="34" charset="0"/>
+              <a:buChar char="•"/>
+            </a:pPr>
+            <a:r>
+              <a:rPr lang="en-US" dirty="0"/>
+              <a:t>Do NOT page number your paper</a:t>
+            </a:r>
+          </a:p>
+          <a:p>
+            <a:pPr marL="285750" indent="-285750">
+              <a:buFont typeface="Arial" panose="020B0604020202020204" pitchFamily="34" charset="0"/>
+              <a:buChar char="•"/>
+            </a:pPr>
+            <a:r>
+              <a:rPr lang="en-US" dirty="0"/>
+              <a:t>Do NOT apply security settings to your PDF file.</a:t>
+            </a:r>
+          </a:p>
+          <a:p>
+            <a:pPr marL="285750" indent="-285750">
+              <a:buFont typeface="Arial" panose="020B0604020202020204" pitchFamily="34" charset="0"/>
+              <a:buChar char="•"/>
+            </a:pPr>
+            <a:r>
+              <a:rPr lang="en-US" dirty="0"/>
+              <a:t>As part of the submission, you will be asked explicitly to briefly describe the novelty of your paper within 1,000 characters.</a:t>
+            </a:r>
+          </a:p>
+          <a:p>
+            <a:endParaRPr lang="en-US" b="1" dirty="0"/>
           </a:p>
         </p:txBody>
       </p:sp>
@@ -16237,7 +16793,7 @@
           <p:cNvPr id="4" name="Title 3">
             <a:extLst>
               <a:ext uri="{FF2B5EF4-FFF2-40B4-BE49-F238E27FC236}">
-                <a16:creationId xmlns:a16="http://schemas.microsoft.com/office/drawing/2014/main" id="{38C5F57F-D41F-FAF8-68C5-CD8D95AF87F4}"/>
+                <a16:creationId xmlns:a16="http://schemas.microsoft.com/office/drawing/2014/main" id="{0FABF408-7685-5C75-AFB5-C69910775DEB}"/>
               </a:ext>
             </a:extLst>
           </p:cNvPr>
@@ -16255,7 +16811,7 @@
           <a:p>
             <a:r>
               <a:rPr lang="en-US" dirty="0"/>
-              <a:t>Next Week</a:t>
+              <a:t>Paper Updates</a:t>
             </a:r>
           </a:p>
         </p:txBody>
@@ -16265,7 +16821,7 @@
           <p:cNvPr id="5" name="Footer Placeholder 4">
             <a:extLst>
               <a:ext uri="{FF2B5EF4-FFF2-40B4-BE49-F238E27FC236}">
-                <a16:creationId xmlns:a16="http://schemas.microsoft.com/office/drawing/2014/main" id="{8E633180-B8A6-C9B8-09AC-F39A8DDB0F4A}"/>
+                <a16:creationId xmlns:a16="http://schemas.microsoft.com/office/drawing/2014/main" id="{4BFCD0E0-E242-A740-2242-79B52EB173D7}"/>
               </a:ext>
             </a:extLst>
           </p:cNvPr>
@@ -16283,17 +16839,16 @@
           <a:p>
             <a:pPr algn="r"/>
             <a:r>
-              <a:rPr lang="en-US"/>
-              <a:t>3/31/23            ‹#›</a:t>
-            </a:r>
-            <a:endParaRPr lang="en-US" dirty="0"/>
+              <a:rPr lang="en-US" dirty="0"/>
+              <a:t>9/11</a:t>
+            </a:r>
           </a:p>
         </p:txBody>
       </p:sp>
     </p:spTree>
     <p:extLst>
       <p:ext uri="{BB962C8B-B14F-4D97-AF65-F5344CB8AC3E}">
-        <p14:creationId xmlns:p14="http://schemas.microsoft.com/office/powerpoint/2010/main" val="1589025477"/>
+        <p14:creationId xmlns:p14="http://schemas.microsoft.com/office/powerpoint/2010/main" val="2190980679"/>
       </p:ext>
     </p:extLst>
   </p:cSld>
@@ -16886,6 +17441,58 @@
 </file>
 
 <file path=customXml/item1.xml><?xml version="1.0" encoding="utf-8"?>
+<p:properties xmlns:p="http://schemas.microsoft.com/office/2006/metadata/properties" xmlns:xsi="http://www.w3.org/2001/XMLSchema-instance" xmlns:pc="http://schemas.microsoft.com/office/infopath/2007/PartnerControls">
+  <documentManagement>
+    <SharedWithUsers xmlns="d6656b4d-3fa0-4709-acfb-d5e813445d1e">
+      <UserInfo>
+        <DisplayName>Schott, Thomas H.</DisplayName>
+        <AccountId>17</AccountId>
+        <AccountType/>
+      </UserInfo>
+      <UserInfo>
+        <DisplayName>Sarault, Olivia M</DisplayName>
+        <AccountId>29</AccountId>
+        <AccountType/>
+      </UserInfo>
+      <UserInfo>
+        <DisplayName>Hiller, Kelly R</DisplayName>
+        <AccountId>98</AccountId>
+        <AccountType/>
+      </UserInfo>
+      <UserInfo>
+        <DisplayName>Eddy, Abigail Ellen</DisplayName>
+        <AccountId>46</AccountId>
+        <AccountType/>
+      </UserInfo>
+      <UserInfo>
+        <DisplayName>Gu, Yu Rain</DisplayName>
+        <AccountId>77</AccountId>
+        <AccountType/>
+      </UserInfo>
+      <UserInfo>
+        <DisplayName>Reese, Kristy S</DisplayName>
+        <AccountId>26</AccountId>
+        <AccountType/>
+      </UserInfo>
+    </SharedWithUsers>
+    <lcf76f155ced4ddcb4097134ff3c332f xmlns="37af3f4b-4b66-46f9-8456-831d9bc3e737">
+      <Terms xmlns="http://schemas.microsoft.com/office/infopath/2007/PartnerControls"/>
+    </lcf76f155ced4ddcb4097134ff3c332f>
+    <TaxCatchAll xmlns="d6656b4d-3fa0-4709-acfb-d5e813445d1e" xsi:nil="true"/>
+  </documentManagement>
+</p:properties>
+</file>
+
+<file path=customXml/item2.xml><?xml version="1.0" encoding="utf-8"?>
+<?mso-contentType ?>
+<FormTemplates xmlns="http://schemas.microsoft.com/sharepoint/v3/contenttype/forms">
+  <Display>DocumentLibraryForm</Display>
+  <Edit>DocumentLibraryForm</Edit>
+  <New>DocumentLibraryForm</New>
+</FormTemplates>
+</file>
+
+<file path=customXml/item3.xml><?xml version="1.0" encoding="utf-8"?>
 <ct:contentTypeSchema xmlns:ct="http://schemas.microsoft.com/office/2006/metadata/contentType" xmlns:ma="http://schemas.microsoft.com/office/2006/metadata/properties/metaAttributes" ct:_="" ma:_="" ma:contentTypeName="Document" ma:contentTypeID="0x01010054E202481DC1CB46AA011D949D311478" ma:contentTypeVersion="13" ma:contentTypeDescription="Create a new document." ma:contentTypeScope="" ma:versionID="309c718596e4092f54ce9aa93358bb8d">
   <xsd:schema xmlns:xsd="http://www.w3.org/2001/XMLSchema" xmlns:xs="http://www.w3.org/2001/XMLSchema" xmlns:p="http://schemas.microsoft.com/office/2006/metadata/properties" xmlns:ns2="37af3f4b-4b66-46f9-8456-831d9bc3e737" xmlns:ns3="d6656b4d-3fa0-4709-acfb-d5e813445d1e" targetNamespace="http://schemas.microsoft.com/office/2006/metadata/properties" ma:root="true" ma:fieldsID="0c34f3e70276db9d2471c2526b8de3df" ns2:_="" ns3:_="">
     <xsd:import namespace="37af3f4b-4b66-46f9-8456-831d9bc3e737"/>
@@ -17108,59 +17715,32 @@
 </ct:contentTypeSchema>
 </file>
 
-<file path=customXml/item2.xml><?xml version="1.0" encoding="utf-8"?>
-<?mso-contentType ?>
-<FormTemplates xmlns="http://schemas.microsoft.com/sharepoint/v3/contenttype/forms">
-  <Display>DocumentLibraryForm</Display>
-  <Edit>DocumentLibraryForm</Edit>
-  <New>DocumentLibraryForm</New>
-</FormTemplates>
+<file path=customXml/itemProps1.xml><?xml version="1.0" encoding="utf-8"?>
+<ds:datastoreItem xmlns:ds="http://schemas.openxmlformats.org/officeDocument/2006/customXml" ds:itemID="{21DE0D6C-581B-4814-98E7-EF172D5D46A1}">
+  <ds:schemaRefs>
+    <ds:schemaRef ds:uri="http://purl.org/dc/elements/1.1/"/>
+    <ds:schemaRef ds:uri="http://schemas.microsoft.com/office/2006/documentManagement/types"/>
+    <ds:schemaRef ds:uri="d6656b4d-3fa0-4709-acfb-d5e813445d1e"/>
+    <ds:schemaRef ds:uri="http://purl.org/dc/terms/"/>
+    <ds:schemaRef ds:uri="http://schemas.microsoft.com/office/infopath/2007/PartnerControls"/>
+    <ds:schemaRef ds:uri="37af3f4b-4b66-46f9-8456-831d9bc3e737"/>
+    <ds:schemaRef ds:uri="http://schemas.openxmlformats.org/package/2006/metadata/core-properties"/>
+    <ds:schemaRef ds:uri="http://schemas.microsoft.com/office/2006/metadata/properties"/>
+    <ds:schemaRef ds:uri="http://www.w3.org/XML/1998/namespace"/>
+    <ds:schemaRef ds:uri="http://purl.org/dc/dcmitype/"/>
+  </ds:schemaRefs>
+</ds:datastoreItem>
 </file>
 
-<file path=customXml/item3.xml><?xml version="1.0" encoding="utf-8"?>
-<p:properties xmlns:p="http://schemas.microsoft.com/office/2006/metadata/properties" xmlns:xsi="http://www.w3.org/2001/XMLSchema-instance" xmlns:pc="http://schemas.microsoft.com/office/infopath/2007/PartnerControls">
-  <documentManagement>
-    <SharedWithUsers xmlns="d6656b4d-3fa0-4709-acfb-d5e813445d1e">
-      <UserInfo>
-        <DisplayName>Schott, Thomas H.</DisplayName>
-        <AccountId>17</AccountId>
-        <AccountType/>
-      </UserInfo>
-      <UserInfo>
-        <DisplayName>Sarault, Olivia M</DisplayName>
-        <AccountId>29</AccountId>
-        <AccountType/>
-      </UserInfo>
-      <UserInfo>
-        <DisplayName>Hiller, Kelly R</DisplayName>
-        <AccountId>98</AccountId>
-        <AccountType/>
-      </UserInfo>
-      <UserInfo>
-        <DisplayName>Eddy, Abigail Ellen</DisplayName>
-        <AccountId>46</AccountId>
-        <AccountType/>
-      </UserInfo>
-      <UserInfo>
-        <DisplayName>Gu, Yu Rain</DisplayName>
-        <AccountId>77</AccountId>
-        <AccountType/>
-      </UserInfo>
-      <UserInfo>
-        <DisplayName>Reese, Kristy S</DisplayName>
-        <AccountId>26</AccountId>
-        <AccountType/>
-      </UserInfo>
-    </SharedWithUsers>
-    <lcf76f155ced4ddcb4097134ff3c332f xmlns="37af3f4b-4b66-46f9-8456-831d9bc3e737">
-      <Terms xmlns="http://schemas.microsoft.com/office/infopath/2007/PartnerControls"/>
-    </lcf76f155ced4ddcb4097134ff3c332f>
-    <TaxCatchAll xmlns="d6656b4d-3fa0-4709-acfb-d5e813445d1e" xsi:nil="true"/>
-  </documentManagement>
-</p:properties>
+<file path=customXml/itemProps2.xml><?xml version="1.0" encoding="utf-8"?>
+<ds:datastoreItem xmlns:ds="http://schemas.openxmlformats.org/officeDocument/2006/customXml" ds:itemID="{F5B64EEB-1B4A-4920-AA44-E234D7D487D1}">
+  <ds:schemaRefs>
+    <ds:schemaRef ds:uri="http://schemas.microsoft.com/sharepoint/v3/contenttype/forms"/>
+  </ds:schemaRefs>
+</ds:datastoreItem>
 </file>
 
-<file path=customXml/itemProps1.xml><?xml version="1.0" encoding="utf-8"?>
+<file path=customXml/itemProps3.xml><?xml version="1.0" encoding="utf-8"?>
 <ds:datastoreItem xmlns:ds="http://schemas.openxmlformats.org/officeDocument/2006/customXml" ds:itemID="{64D795B0-FAA0-424A-9B96-7691ED1EF26B}">
   <ds:schemaRefs>
     <ds:schemaRef ds:uri="http://schemas.microsoft.com/office/2006/metadata/contentType"/>
@@ -17177,29 +17757,4 @@
     <ds:schemaRef ds:uri="http://schemas.microsoft.com/internal/obd"/>
   </ds:schemaRefs>
 </ds:datastoreItem>
-</file>
-
-<file path=customXml/itemProps2.xml><?xml version="1.0" encoding="utf-8"?>
-<ds:datastoreItem xmlns:ds="http://schemas.openxmlformats.org/officeDocument/2006/customXml" ds:itemID="{F5B64EEB-1B4A-4920-AA44-E234D7D487D1}">
-  <ds:schemaRefs>
-    <ds:schemaRef ds:uri="http://schemas.microsoft.com/sharepoint/v3/contenttype/forms"/>
-  </ds:schemaRefs>
-</ds:datastoreItem>
-</file>
-
-<file path=customXml/itemProps3.xml><?xml version="1.0" encoding="utf-8"?>
-<ds:datastoreItem xmlns:ds="http://schemas.openxmlformats.org/officeDocument/2006/customXml" ds:itemID="{21DE0D6C-581B-4814-98E7-EF172D5D46A1}">
-  <ds:schemaRefs>
-    <ds:schemaRef ds:uri="http://purl.org/dc/elements/1.1/"/>
-    <ds:schemaRef ds:uri="http://schemas.microsoft.com/office/2006/documentManagement/types"/>
-    <ds:schemaRef ds:uri="d6656b4d-3fa0-4709-acfb-d5e813445d1e"/>
-    <ds:schemaRef ds:uri="http://purl.org/dc/terms/"/>
-    <ds:schemaRef ds:uri="http://schemas.microsoft.com/office/infopath/2007/PartnerControls"/>
-    <ds:schemaRef ds:uri="37af3f4b-4b66-46f9-8456-831d9bc3e737"/>
-    <ds:schemaRef ds:uri="http://schemas.openxmlformats.org/package/2006/metadata/core-properties"/>
-    <ds:schemaRef ds:uri="http://schemas.microsoft.com/office/2006/metadata/properties"/>
-    <ds:schemaRef ds:uri="http://www.w3.org/XML/1998/namespace"/>
-    <ds:schemaRef ds:uri="http://purl.org/dc/dcmitype/"/>
-  </ds:schemaRefs>
-</ds:datastoreItem>
 </file>